--- a/docs/TokenOptimizer-Hackcelerate.pptx
+++ b/docs/TokenOptimizer-Hackcelerate.pptx
@@ -17,6 +17,7 @@
     <p:sldId id="265" r:id="rId16"/>
     <p:sldId id="266" r:id="rId17"/>
     <p:sldId id="267" r:id="rId18"/>
+    <p:sldId id="268" r:id="rId19"/>
   </p:sldIdLst>
   <p:sldSz cx="12191695" cy="6858000" type="screen4x3"/>
   <p:notesSz cx="6858000" cy="9144000"/>
@@ -3799,7 +3800,7 @@
                 </a:solidFill>
                 <a:latin typeface="Segoe UI"/>
               </a:rPr>
-              <a:t>LAYERED, OFFLINE-FIRST</a:t>
+              <a:t>NARRATED WALKTHROUGH OF EVERY FEATURE</a:t>
             </a:r>
           </a:p>
           <a:p>
@@ -3818,30 +3819,212 @@
                 </a:solidFill>
                 <a:latin typeface="Segoe UI"/>
               </a:rPr>
-              <a:t>Architecture</a:t>
-            </a:r>
-          </a:p>
-        </p:txBody>
-      </p:sp>
-      <p:sp>
-        <p:nvSpPr>
-          <p:cNvPr id="5" name="Rounded Rectangle 4"/>
+              <a:t>Demo Video</a:t>
+            </a:r>
+          </a:p>
+        </p:txBody>
+      </p:sp>
+      <p:sp>
+        <p:nvSpPr>
+          <p:cNvPr id="5" name="TextBox 4"/>
+          <p:cNvSpPr txBox="1"/>
+          <p:nvPr/>
+        </p:nvSpPr>
+        <p:spPr>
+          <a:xfrm>
+            <a:off x="640080" y="1463040"/>
+            <a:ext cx="4114800" cy="4572000"/>
+          </a:xfrm>
+          <a:prstGeom prst="rect">
+            <a:avLst/>
+          </a:prstGeom>
+          <a:noFill/>
+        </p:spPr>
+        <p:txBody>
+          <a:bodyPr wrap="square" anchor="t">
+            <a:spAutoFit/>
+          </a:bodyPr>
+          <a:lstStyle/>
+          <a:p>
+            <a:pPr algn="l">
+              <a:spcBef>
+                <a:spcPts val="0"/>
+              </a:spcBef>
+              <a:spcAft>
+                <a:spcPts val="400"/>
+              </a:spcAft>
+            </a:pPr>
+            <a:r>
+              <a:rPr sz="1700" b="1">
+                <a:solidFill>
+                  <a:srgbClr val="12365C"/>
+                </a:solidFill>
+                <a:latin typeface="Segoe UI"/>
+              </a:rPr>
+              <a:t>A 3:14 narrated video</a:t>
+            </a:r>
+          </a:p>
+          <a:p>
+            <a:pPr algn="l">
+              <a:spcBef>
+                <a:spcPts val="0"/>
+              </a:spcBef>
+              <a:spcAft>
+                <a:spcPts val="1200"/>
+              </a:spcAft>
+            </a:pPr>
+            <a:r>
+              <a:rPr sz="1300" b="0">
+                <a:solidFill>
+                  <a:srgbClr val="16233A"/>
+                </a:solidFill>
+                <a:latin typeface="Segoe UI"/>
+              </a:rPr>
+              <a:t>16 scenes with voice-over and on-screen captions.</a:t>
+            </a:r>
+          </a:p>
+          <a:p>
+            <a:pPr algn="l">
+              <a:spcBef>
+                <a:spcPts val="0"/>
+              </a:spcBef>
+              <a:spcAft>
+                <a:spcPts val="400"/>
+              </a:spcAft>
+            </a:pPr>
+            <a:r>
+              <a:rPr sz="1700" b="1">
+                <a:solidFill>
+                  <a:srgbClr val="12365C"/>
+                </a:solidFill>
+                <a:latin typeface="Segoe UI"/>
+              </a:rPr>
+              <a:t>Covers every feature</a:t>
+            </a:r>
+          </a:p>
+          <a:p>
+            <a:pPr algn="l">
+              <a:spcBef>
+                <a:spcPts val="0"/>
+              </a:spcBef>
+              <a:spcAft>
+                <a:spcPts val="1200"/>
+              </a:spcAft>
+            </a:pPr>
+            <a:r>
+              <a:rPr sz="1300" b="0">
+                <a:solidFill>
+                  <a:srgbClr val="16233A"/>
+                </a:solidFill>
+                <a:latin typeface="Segoe UI"/>
+              </a:rPr>
+              <a:t>Document / JIRA / GitHub optimization, the offline pipeline, both skills, A/B validation, the dashboard, the guided demo, and the CLI.</a:t>
+            </a:r>
+          </a:p>
+          <a:p>
+            <a:pPr algn="l">
+              <a:spcBef>
+                <a:spcPts val="0"/>
+              </a:spcBef>
+              <a:spcAft>
+                <a:spcPts val="400"/>
+              </a:spcAft>
+            </a:pPr>
+            <a:r>
+              <a:rPr sz="1700" b="1">
+                <a:solidFill>
+                  <a:srgbClr val="12365C"/>
+                </a:solidFill>
+                <a:latin typeface="Segoe UI"/>
+              </a:rPr>
+              <a:t>Reproducible &amp; offline</a:t>
+            </a:r>
+          </a:p>
+          <a:p>
+            <a:pPr algn="l">
+              <a:spcBef>
+                <a:spcPts val="0"/>
+              </a:spcBef>
+              <a:spcAft>
+                <a:spcPts val="1200"/>
+              </a:spcAft>
+            </a:pPr>
+            <a:r>
+              <a:rPr sz="1300" b="0">
+                <a:solidFill>
+                  <a:srgbClr val="16233A"/>
+                </a:solidFill>
+                <a:latin typeface="Segoe UI"/>
+              </a:rPr>
+              <a:t>Built with scripts/generate_demo_video.py (SAPI voice-over + ffmpeg).</a:t>
+            </a:r>
+          </a:p>
+          <a:p>
+            <a:pPr algn="l">
+              <a:spcBef>
+                <a:spcPts val="0"/>
+              </a:spcBef>
+              <a:spcAft>
+                <a:spcPts val="600"/>
+              </a:spcAft>
+            </a:pPr>
+            <a:r>
+              <a:rPr sz="1200" b="0">
+                <a:solidFill>
+                  <a:srgbClr val="5F6B7D"/>
+                </a:solidFill>
+                <a:latin typeface="Segoe UI"/>
+              </a:rPr>
+              <a:t>File: docs/TokenOptimizer-Demo.mp4</a:t>
+            </a:r>
+          </a:p>
+        </p:txBody>
+      </p:sp>
+      <p:pic>
+        <p:nvPicPr>
+          <p:cNvPr id="6" name="Picture 5" descr="app_optimized.png"/>
+          <p:cNvPicPr>
+            <a:picLocks noChangeAspect="1"/>
+          </p:cNvPicPr>
+          <p:nvPr/>
+        </p:nvPicPr>
+        <p:blipFill>
+          <a:blip r:embed="rId2"/>
+          <a:stretch>
+            <a:fillRect/>
+          </a:stretch>
+        </p:blipFill>
+        <p:spPr>
+          <a:xfrm>
+            <a:off x="5029200" y="1554480"/>
+            <a:ext cx="6583680" cy="3677920"/>
+          </a:xfrm>
+          <a:prstGeom prst="rect">
+            <a:avLst/>
+          </a:prstGeom>
+        </p:spPr>
+      </p:pic>
+      <p:sp>
+        <p:nvSpPr>
+          <p:cNvPr id="7" name="Oval 6"/>
           <p:cNvSpPr/>
           <p:nvPr/>
         </p:nvSpPr>
         <p:spPr>
           <a:xfrm>
-            <a:off x="640080" y="1554480"/>
-            <a:ext cx="10881360" cy="841248"/>
-          </a:xfrm>
-          <a:prstGeom prst="roundRect">
+            <a:off x="7790688" y="2863088"/>
+            <a:ext cx="1060704" cy="1060704"/>
+          </a:xfrm>
+          <a:prstGeom prst="ellipse">
             <a:avLst/>
           </a:prstGeom>
           <a:solidFill>
             <a:srgbClr val="12365C"/>
           </a:solidFill>
-          <a:ln>
-            <a:noFill/>
+          <a:ln w="31750">
+            <a:solidFill>
+              <a:srgbClr val="FFFFFF"/>
+            </a:solidFill>
           </a:ln>
           <a:effectLst/>
         </p:spPr>
@@ -3869,14 +4052,14 @@
       </p:sp>
       <p:sp>
         <p:nvSpPr>
-          <p:cNvPr id="6" name="TextBox 5"/>
+          <p:cNvPr id="8" name="TextBox 7"/>
           <p:cNvSpPr txBox="1"/>
           <p:nvPr/>
         </p:nvSpPr>
         <p:spPr>
           <a:xfrm>
-            <a:off x="914400" y="1554480"/>
-            <a:ext cx="3108960" cy="841248"/>
+            <a:off x="7790688" y="2844800"/>
+            <a:ext cx="1060704" cy="1060704"/>
           </a:xfrm>
           <a:prstGeom prst="rect">
             <a:avLst/>
@@ -3889,7 +4072,7 @@
           </a:bodyPr>
           <a:lstStyle/>
           <a:p>
-            <a:pPr algn="l">
+            <a:pPr algn="ctr">
               <a:spcBef>
                 <a:spcPts val="0"/>
               </a:spcBef>
@@ -3898,100 +4081,14 @@
               </a:spcAft>
             </a:pPr>
             <a:r>
-              <a:rPr sz="1600" b="1">
+              <a:rPr sz="3200" b="1">
                 <a:solidFill>
                   <a:srgbClr val="FFFFFF"/>
                 </a:solidFill>
                 <a:latin typeface="Segoe UI"/>
               </a:rPr>
-              <a:t>Interfaces</a:t>
-            </a:r>
-          </a:p>
-        </p:txBody>
-      </p:sp>
-      <p:sp>
-        <p:nvSpPr>
-          <p:cNvPr id="7" name="TextBox 6"/>
-          <p:cNvSpPr txBox="1"/>
-          <p:nvPr/>
-        </p:nvSpPr>
-        <p:spPr>
-          <a:xfrm>
-            <a:off x="4114800" y="1554480"/>
-            <a:ext cx="7315200" cy="841248"/>
-          </a:xfrm>
-          <a:prstGeom prst="rect">
-            <a:avLst/>
-          </a:prstGeom>
-          <a:noFill/>
-        </p:spPr>
-        <p:txBody>
-          <a:bodyPr wrap="square" anchor="ctr">
-            <a:spAutoFit/>
-          </a:bodyPr>
-          <a:lstStyle/>
-          <a:p>
-            <a:pPr algn="l">
-              <a:spcBef>
-                <a:spcPts val="0"/>
-              </a:spcBef>
-              <a:spcAft>
-                <a:spcPts val="600"/>
-              </a:spcAft>
-            </a:pPr>
-            <a:r>
-              <a:rPr sz="1300" b="0">
-                <a:solidFill>
-                  <a:srgbClr val="E8EEF7"/>
-                </a:solidFill>
-                <a:latin typeface="Segoe UI"/>
-              </a:rPr>
-              <a:t>CLI · Desktop UI · Packaged skills</a:t>
-            </a:r>
-          </a:p>
-        </p:txBody>
-      </p:sp>
-      <p:sp>
-        <p:nvSpPr>
-          <p:cNvPr id="8" name="Rounded Rectangle 7"/>
-          <p:cNvSpPr/>
-          <p:nvPr/>
-        </p:nvSpPr>
-        <p:spPr>
-          <a:xfrm>
-            <a:off x="640080" y="2487168"/>
-            <a:ext cx="10881360" cy="841248"/>
-          </a:xfrm>
-          <a:prstGeom prst="roundRect">
-            <a:avLst/>
-          </a:prstGeom>
-          <a:solidFill>
-            <a:srgbClr val="1A5EB8"/>
-          </a:solidFill>
-          <a:ln>
-            <a:noFill/>
-          </a:ln>
-          <a:effectLst/>
-        </p:spPr>
-        <p:style>
-          <a:lnRef idx="1">
-            <a:schemeClr val="accent1"/>
-          </a:lnRef>
-          <a:fillRef idx="3">
-            <a:schemeClr val="accent1"/>
-          </a:fillRef>
-          <a:effectRef idx="2">
-            <a:schemeClr val="accent1"/>
-          </a:effectRef>
-          <a:fontRef idx="minor">
-            <a:schemeClr val="lt1"/>
-          </a:fontRef>
-        </p:style>
-        <p:txBody>
-          <a:bodyPr rtlCol="0" anchor="ctr"/>
-          <a:lstStyle/>
-          <a:p>
-            <a:pPr algn="ctr"/>
+              <a:t>▶</a:t>
+            </a:r>
           </a:p>
         </p:txBody>
       </p:sp>
@@ -4003,476 +4100,8 @@
         </p:nvSpPr>
         <p:spPr>
           <a:xfrm>
-            <a:off x="914400" y="2487168"/>
-            <a:ext cx="3108960" cy="841248"/>
-          </a:xfrm>
-          <a:prstGeom prst="rect">
-            <a:avLst/>
-          </a:prstGeom>
-          <a:noFill/>
-        </p:spPr>
-        <p:txBody>
-          <a:bodyPr wrap="square" anchor="ctr">
-            <a:spAutoFit/>
-          </a:bodyPr>
-          <a:lstStyle/>
-          <a:p>
-            <a:pPr algn="l">
-              <a:spcBef>
-                <a:spcPts val="0"/>
-              </a:spcBef>
-              <a:spcAft>
-                <a:spcPts val="600"/>
-              </a:spcAft>
-            </a:pPr>
-            <a:r>
-              <a:rPr sz="1600" b="1">
-                <a:solidFill>
-                  <a:srgbClr val="FFFFFF"/>
-                </a:solidFill>
-                <a:latin typeface="Segoe UI"/>
-              </a:rPr>
-              <a:t>Skills &amp; Evaluation</a:t>
-            </a:r>
-          </a:p>
-        </p:txBody>
-      </p:sp>
-      <p:sp>
-        <p:nvSpPr>
-          <p:cNvPr id="10" name="TextBox 9"/>
-          <p:cNvSpPr txBox="1"/>
-          <p:nvPr/>
-        </p:nvSpPr>
-        <p:spPr>
-          <a:xfrm>
-            <a:off x="4114800" y="2487168"/>
-            <a:ext cx="7315200" cy="841248"/>
-          </a:xfrm>
-          <a:prstGeom prst="rect">
-            <a:avLst/>
-          </a:prstGeom>
-          <a:noFill/>
-        </p:spPr>
-        <p:txBody>
-          <a:bodyPr wrap="square" anchor="ctr">
-            <a:spAutoFit/>
-          </a:bodyPr>
-          <a:lstStyle/>
-          <a:p>
-            <a:pPr algn="l">
-              <a:spcBef>
-                <a:spcPts val="0"/>
-              </a:spcBef>
-              <a:spcAft>
-                <a:spcPts val="600"/>
-              </a:spcAft>
-            </a:pPr>
-            <a:r>
-              <a:rPr sz="1300" b="0">
-                <a:solidFill>
-                  <a:srgbClr val="E8EEF7"/>
-                </a:solidFill>
-                <a:latin typeface="Segoe UI"/>
-              </a:rPr>
-              <a:t>prd · anchor · router · A/B runner · dashboard</a:t>
-            </a:r>
-          </a:p>
-        </p:txBody>
-      </p:sp>
-      <p:sp>
-        <p:nvSpPr>
-          <p:cNvPr id="11" name="Rounded Rectangle 10"/>
-          <p:cNvSpPr/>
-          <p:nvPr/>
-        </p:nvSpPr>
-        <p:spPr>
-          <a:xfrm>
-            <a:off x="640080" y="3419856"/>
-            <a:ext cx="10881360" cy="841248"/>
-          </a:xfrm>
-          <a:prstGeom prst="roundRect">
-            <a:avLst/>
-          </a:prstGeom>
-          <a:solidFill>
-            <a:srgbClr val="134A94"/>
-          </a:solidFill>
-          <a:ln>
-            <a:noFill/>
-          </a:ln>
-          <a:effectLst/>
-        </p:spPr>
-        <p:style>
-          <a:lnRef idx="1">
-            <a:schemeClr val="accent1"/>
-          </a:lnRef>
-          <a:fillRef idx="3">
-            <a:schemeClr val="accent1"/>
-          </a:fillRef>
-          <a:effectRef idx="2">
-            <a:schemeClr val="accent1"/>
-          </a:effectRef>
-          <a:fontRef idx="minor">
-            <a:schemeClr val="lt1"/>
-          </a:fontRef>
-        </p:style>
-        <p:txBody>
-          <a:bodyPr rtlCol="0" anchor="ctr"/>
-          <a:lstStyle/>
-          <a:p>
-            <a:pPr algn="ctr"/>
-          </a:p>
-        </p:txBody>
-      </p:sp>
-      <p:sp>
-        <p:nvSpPr>
-          <p:cNvPr id="12" name="TextBox 11"/>
-          <p:cNvSpPr txBox="1"/>
-          <p:nvPr/>
-        </p:nvSpPr>
-        <p:spPr>
-          <a:xfrm>
-            <a:off x="914400" y="3419856"/>
-            <a:ext cx="3108960" cy="841248"/>
-          </a:xfrm>
-          <a:prstGeom prst="rect">
-            <a:avLst/>
-          </a:prstGeom>
-          <a:noFill/>
-        </p:spPr>
-        <p:txBody>
-          <a:bodyPr wrap="square" anchor="ctr">
-            <a:spAutoFit/>
-          </a:bodyPr>
-          <a:lstStyle/>
-          <a:p>
-            <a:pPr algn="l">
-              <a:spcBef>
-                <a:spcPts val="0"/>
-              </a:spcBef>
-              <a:spcAft>
-                <a:spcPts val="600"/>
-              </a:spcAft>
-            </a:pPr>
-            <a:r>
-              <a:rPr sz="1600" b="1">
-                <a:solidFill>
-                  <a:srgbClr val="FFFFFF"/>
-                </a:solidFill>
-                <a:latin typeface="Segoe UI"/>
-              </a:rPr>
-              <a:t>Optimize</a:t>
-            </a:r>
-          </a:p>
-        </p:txBody>
-      </p:sp>
-      <p:sp>
-        <p:nvSpPr>
-          <p:cNvPr id="13" name="TextBox 12"/>
-          <p:cNvSpPr txBox="1"/>
-          <p:nvPr/>
-        </p:nvSpPr>
-        <p:spPr>
-          <a:xfrm>
-            <a:off x="4114800" y="3419856"/>
-            <a:ext cx="7315200" cy="841248"/>
-          </a:xfrm>
-          <a:prstGeom prst="rect">
-            <a:avLst/>
-          </a:prstGeom>
-          <a:noFill/>
-        </p:spPr>
-        <p:txBody>
-          <a:bodyPr wrap="square" anchor="ctr">
-            <a:spAutoFit/>
-          </a:bodyPr>
-          <a:lstStyle/>
-          <a:p>
-            <a:pPr algn="l">
-              <a:spcBef>
-                <a:spcPts val="0"/>
-              </a:spcBef>
-              <a:spcAft>
-                <a:spcPts val="600"/>
-              </a:spcAft>
-            </a:pPr>
-            <a:r>
-              <a:rPr sz="1300" b="0">
-                <a:solidFill>
-                  <a:srgbClr val="E8EEF7"/>
-                </a:solidFill>
-                <a:latin typeface="Segoe UI"/>
-              </a:rPr>
-              <a:t>reductions · compress · summarize · prefilter · tokens</a:t>
-            </a:r>
-          </a:p>
-        </p:txBody>
-      </p:sp>
-      <p:sp>
-        <p:nvSpPr>
-          <p:cNvPr id="14" name="Rounded Rectangle 13"/>
-          <p:cNvSpPr/>
-          <p:nvPr/>
-        </p:nvSpPr>
-        <p:spPr>
-          <a:xfrm>
-            <a:off x="640080" y="4352544"/>
-            <a:ext cx="10881360" cy="841248"/>
-          </a:xfrm>
-          <a:prstGeom prst="roundRect">
-            <a:avLst/>
-          </a:prstGeom>
-          <a:solidFill>
-            <a:srgbClr val="2C6BB0"/>
-          </a:solidFill>
-          <a:ln>
-            <a:noFill/>
-          </a:ln>
-          <a:effectLst/>
-        </p:spPr>
-        <p:style>
-          <a:lnRef idx="1">
-            <a:schemeClr val="accent1"/>
-          </a:lnRef>
-          <a:fillRef idx="3">
-            <a:schemeClr val="accent1"/>
-          </a:fillRef>
-          <a:effectRef idx="2">
-            <a:schemeClr val="accent1"/>
-          </a:effectRef>
-          <a:fontRef idx="minor">
-            <a:schemeClr val="lt1"/>
-          </a:fontRef>
-        </p:style>
-        <p:txBody>
-          <a:bodyPr rtlCol="0" anchor="ctr"/>
-          <a:lstStyle/>
-          <a:p>
-            <a:pPr algn="ctr"/>
-          </a:p>
-        </p:txBody>
-      </p:sp>
-      <p:sp>
-        <p:nvSpPr>
-          <p:cNvPr id="15" name="TextBox 14"/>
-          <p:cNvSpPr txBox="1"/>
-          <p:nvPr/>
-        </p:nvSpPr>
-        <p:spPr>
-          <a:xfrm>
-            <a:off x="914400" y="4352544"/>
-            <a:ext cx="3108960" cy="841248"/>
-          </a:xfrm>
-          <a:prstGeom prst="rect">
-            <a:avLst/>
-          </a:prstGeom>
-          <a:noFill/>
-        </p:spPr>
-        <p:txBody>
-          <a:bodyPr wrap="square" anchor="ctr">
-            <a:spAutoFit/>
-          </a:bodyPr>
-          <a:lstStyle/>
-          <a:p>
-            <a:pPr algn="l">
-              <a:spcBef>
-                <a:spcPts val="0"/>
-              </a:spcBef>
-              <a:spcAft>
-                <a:spcPts val="600"/>
-              </a:spcAft>
-            </a:pPr>
-            <a:r>
-              <a:rPr sz="1600" b="1">
-                <a:solidFill>
-                  <a:srgbClr val="FFFFFF"/>
-                </a:solidFill>
-                <a:latin typeface="Segoe UI"/>
-              </a:rPr>
-              <a:t>Integrations</a:t>
-            </a:r>
-          </a:p>
-        </p:txBody>
-      </p:sp>
-      <p:sp>
-        <p:nvSpPr>
-          <p:cNvPr id="16" name="TextBox 15"/>
-          <p:cNvSpPr txBox="1"/>
-          <p:nvPr/>
-        </p:nvSpPr>
-        <p:spPr>
-          <a:xfrm>
-            <a:off x="4114800" y="4352544"/>
-            <a:ext cx="7315200" cy="841248"/>
-          </a:xfrm>
-          <a:prstGeom prst="rect">
-            <a:avLst/>
-          </a:prstGeom>
-          <a:noFill/>
-        </p:spPr>
-        <p:txBody>
-          <a:bodyPr wrap="square" anchor="ctr">
-            <a:spAutoFit/>
-          </a:bodyPr>
-          <a:lstStyle/>
-          <a:p>
-            <a:pPr algn="l">
-              <a:spcBef>
-                <a:spcPts val="0"/>
-              </a:spcBef>
-              <a:spcAft>
-                <a:spcPts val="600"/>
-              </a:spcAft>
-            </a:pPr>
-            <a:r>
-              <a:rPr sz="1300" b="0">
-                <a:solidFill>
-                  <a:srgbClr val="E8EEF7"/>
-                </a:solidFill>
-                <a:latin typeface="Segoe UI"/>
-              </a:rPr>
-              <a:t>JIRA · GitHub · GitLab · Jenkins · Azure DevOps · documents</a:t>
-            </a:r>
-          </a:p>
-        </p:txBody>
-      </p:sp>
-      <p:sp>
-        <p:nvSpPr>
-          <p:cNvPr id="17" name="Rounded Rectangle 16"/>
-          <p:cNvSpPr/>
-          <p:nvPr/>
-        </p:nvSpPr>
-        <p:spPr>
-          <a:xfrm>
-            <a:off x="640080" y="5285232"/>
-            <a:ext cx="10881360" cy="841248"/>
-          </a:xfrm>
-          <a:prstGeom prst="roundRect">
-            <a:avLst/>
-          </a:prstGeom>
-          <a:solidFill>
-            <a:srgbClr val="1E8E4E"/>
-          </a:solidFill>
-          <a:ln>
-            <a:noFill/>
-          </a:ln>
-          <a:effectLst/>
-        </p:spPr>
-        <p:style>
-          <a:lnRef idx="1">
-            <a:schemeClr val="accent1"/>
-          </a:lnRef>
-          <a:fillRef idx="3">
-            <a:schemeClr val="accent1"/>
-          </a:fillRef>
-          <a:effectRef idx="2">
-            <a:schemeClr val="accent1"/>
-          </a:effectRef>
-          <a:fontRef idx="minor">
-            <a:schemeClr val="lt1"/>
-          </a:fontRef>
-        </p:style>
-        <p:txBody>
-          <a:bodyPr rtlCol="0" anchor="ctr"/>
-          <a:lstStyle/>
-          <a:p>
-            <a:pPr algn="ctr"/>
-          </a:p>
-        </p:txBody>
-      </p:sp>
-      <p:sp>
-        <p:nvSpPr>
-          <p:cNvPr id="18" name="TextBox 17"/>
-          <p:cNvSpPr txBox="1"/>
-          <p:nvPr/>
-        </p:nvSpPr>
-        <p:spPr>
-          <a:xfrm>
-            <a:off x="914400" y="5285232"/>
-            <a:ext cx="3108960" cy="841248"/>
-          </a:xfrm>
-          <a:prstGeom prst="rect">
-            <a:avLst/>
-          </a:prstGeom>
-          <a:noFill/>
-        </p:spPr>
-        <p:txBody>
-          <a:bodyPr wrap="square" anchor="ctr">
-            <a:spAutoFit/>
-          </a:bodyPr>
-          <a:lstStyle/>
-          <a:p>
-            <a:pPr algn="l">
-              <a:spcBef>
-                <a:spcPts val="0"/>
-              </a:spcBef>
-              <a:spcAft>
-                <a:spcPts val="600"/>
-              </a:spcAft>
-            </a:pPr>
-            <a:r>
-              <a:rPr sz="1600" b="1">
-                <a:solidFill>
-                  <a:srgbClr val="FFFFFF"/>
-                </a:solidFill>
-                <a:latin typeface="Segoe UI"/>
-              </a:rPr>
-              <a:t>Core</a:t>
-            </a:r>
-          </a:p>
-        </p:txBody>
-      </p:sp>
-      <p:sp>
-        <p:nvSpPr>
-          <p:cNvPr id="19" name="TextBox 18"/>
-          <p:cNvSpPr txBox="1"/>
-          <p:nvPr/>
-        </p:nvSpPr>
-        <p:spPr>
-          <a:xfrm>
-            <a:off x="4114800" y="5285232"/>
-            <a:ext cx="7315200" cy="841248"/>
-          </a:xfrm>
-          <a:prstGeom prst="rect">
-            <a:avLst/>
-          </a:prstGeom>
-          <a:noFill/>
-        </p:spPr>
-        <p:txBody>
-          <a:bodyPr wrap="square" anchor="ctr">
-            <a:spAutoFit/>
-          </a:bodyPr>
-          <a:lstStyle/>
-          <a:p>
-            <a:pPr algn="l">
-              <a:spcBef>
-                <a:spcPts val="0"/>
-              </a:spcBef>
-              <a:spcAft>
-                <a:spcPts val="600"/>
-              </a:spcAft>
-            </a:pPr>
-            <a:r>
-              <a:rPr sz="1300" b="0">
-                <a:solidFill>
-                  <a:srgbClr val="E8EEF7"/>
-                </a:solidFill>
-                <a:latin typeface="Segoe UI"/>
-              </a:rPr>
-              <a:t>config · run_log · llm (client + cache)</a:t>
-            </a:r>
-          </a:p>
-        </p:txBody>
-      </p:sp>
-      <p:sp>
-        <p:nvSpPr>
-          <p:cNvPr id="20" name="TextBox 19"/>
-          <p:cNvSpPr txBox="1"/>
-          <p:nvPr/>
-        </p:nvSpPr>
-        <p:spPr>
-          <a:xfrm>
-            <a:off x="548640" y="6446520"/>
-            <a:ext cx="8229600" cy="320040"/>
+            <a:off x="5029200" y="5806440"/>
+            <a:ext cx="6583680" cy="365760"/>
           </a:xfrm>
           <a:prstGeom prst="rect">
             <a:avLst/>
@@ -4485,6 +4114,48 @@
           </a:bodyPr>
           <a:lstStyle/>
           <a:p>
+            <a:pPr algn="ctr">
+              <a:spcBef>
+                <a:spcPts val="0"/>
+              </a:spcBef>
+              <a:spcAft>
+                <a:spcPts val="600"/>
+              </a:spcAft>
+            </a:pPr>
+            <a:r>
+              <a:rPr sz="1100" b="0">
+                <a:solidFill>
+                  <a:srgbClr val="5F6B7D"/>
+                </a:solidFill>
+                <a:latin typeface="Segoe UI"/>
+              </a:rPr>
+              <a:t>TokenOptimizer-Demo.mp4  ·  3:14  ·  voice-over</a:t>
+            </a:r>
+          </a:p>
+        </p:txBody>
+      </p:sp>
+      <p:sp>
+        <p:nvSpPr>
+          <p:cNvPr id="10" name="TextBox 9"/>
+          <p:cNvSpPr txBox="1"/>
+          <p:nvPr/>
+        </p:nvSpPr>
+        <p:spPr>
+          <a:xfrm>
+            <a:off x="548640" y="6446520"/>
+            <a:ext cx="8229600" cy="320040"/>
+          </a:xfrm>
+          <a:prstGeom prst="rect">
+            <a:avLst/>
+          </a:prstGeom>
+          <a:noFill/>
+        </p:spPr>
+        <p:txBody>
+          <a:bodyPr wrap="square" anchor="t">
+            <a:spAutoFit/>
+          </a:bodyPr>
+          <a:lstStyle/>
+          <a:p>
             <a:pPr algn="l">
               <a:spcBef>
                 <a:spcPts val="0"/>
@@ -4507,7 +4178,7 @@
       </p:sp>
       <p:sp>
         <p:nvSpPr>
-          <p:cNvPr id="21" name="TextBox 20"/>
+          <p:cNvPr id="11" name="TextBox 10"/>
           <p:cNvSpPr txBox="1"/>
           <p:nvPr/>
         </p:nvSpPr>
@@ -4690,7 +4361,7 @@
                 </a:solidFill>
                 <a:latin typeface="Segoe UI"/>
               </a:rPr>
-              <a:t>WHY IT SCALES</a:t>
+              <a:t>LAYERED, OFFLINE-FIRST</a:t>
             </a:r>
           </a:p>
           <a:p>
@@ -4709,138 +4380,27 @@
                 </a:solidFill>
                 <a:latin typeface="Segoe UI"/>
               </a:rPr>
-              <a:t>Business Value</a:t>
-            </a:r>
-          </a:p>
-        </p:txBody>
-      </p:sp>
-      <p:sp>
-        <p:nvSpPr>
-          <p:cNvPr id="5" name="TextBox 4"/>
-          <p:cNvSpPr txBox="1"/>
-          <p:nvPr/>
-        </p:nvSpPr>
-        <p:spPr>
-          <a:xfrm>
-            <a:off x="640080" y="1417320"/>
-            <a:ext cx="10881360" cy="4572000"/>
-          </a:xfrm>
-          <a:prstGeom prst="rect">
-            <a:avLst/>
-          </a:prstGeom>
-          <a:noFill/>
-        </p:spPr>
-        <p:txBody>
-          <a:bodyPr wrap="square" anchor="t">
-            <a:spAutoFit/>
-          </a:bodyPr>
-          <a:lstStyle/>
-          <a:p>
-            <a:pPr algn="l">
-              <a:lnSpc>
-                <a:spcPct val="105000"/>
-              </a:lnSpc>
-              <a:spcBef>
-                <a:spcPts val="0"/>
-              </a:spcBef>
-              <a:spcAft>
-                <a:spcPts val="1200"/>
-              </a:spcAft>
-            </a:pPr>
-            <a:r>
-              <a:rPr sz="1800" b="0">
-                <a:solidFill>
-                  <a:srgbClr val="16233A"/>
-                </a:solidFill>
-                <a:latin typeface="Segoe UI"/>
-              </a:rPr>
-              <a:t>•  Direct cost savings of up to ~58% on AI-assisted development spend.</a:t>
-            </a:r>
-          </a:p>
-          <a:p>
-            <a:pPr algn="l">
-              <a:lnSpc>
-                <a:spcPct val="105000"/>
-              </a:lnSpc>
-              <a:spcBef>
-                <a:spcPts val="0"/>
-              </a:spcBef>
-              <a:spcAft>
-                <a:spcPts val="1200"/>
-              </a:spcAft>
-            </a:pPr>
-            <a:r>
-              <a:rPr sz="1800" b="0">
-                <a:solidFill>
-                  <a:srgbClr val="16233A"/>
-                </a:solidFill>
-                <a:latin typeface="Segoe UI"/>
-              </a:rPr>
-              <a:t>•  Validated across 2 business units — extensible to the whole org.</a:t>
-            </a:r>
-          </a:p>
-          <a:p>
-            <a:pPr algn="l">
-              <a:lnSpc>
-                <a:spcPct val="105000"/>
-              </a:lnSpc>
-              <a:spcBef>
-                <a:spcPts val="0"/>
-              </a:spcBef>
-              <a:spcAft>
-                <a:spcPts val="1200"/>
-              </a:spcAft>
-            </a:pPr>
-            <a:r>
-              <a:rPr sz="1800" b="0">
-                <a:solidFill>
-                  <a:srgbClr val="16233A"/>
-                </a:solidFill>
-                <a:latin typeface="Segoe UI"/>
-              </a:rPr>
-              <a:t>•  Higher trust in AI output through verifiable file:line anchoring.</a:t>
-            </a:r>
-          </a:p>
-          <a:p>
-            <a:pPr algn="l">
-              <a:lnSpc>
-                <a:spcPct val="105000"/>
-              </a:lnSpc>
-              <a:spcBef>
-                <a:spcPts val="0"/>
-              </a:spcBef>
-              <a:spcAft>
-                <a:spcPts val="1200"/>
-              </a:spcAft>
-            </a:pPr>
-            <a:r>
-              <a:rPr sz="1800" b="0">
-                <a:solidFill>
-                  <a:srgbClr val="16233A"/>
-                </a:solidFill>
-                <a:latin typeface="Segoe UI"/>
-              </a:rPr>
-              <a:t>•  Data-driven — every claim backed by A/B evidence, not anecdote.</a:t>
-            </a:r>
-          </a:p>
-        </p:txBody>
-      </p:sp>
-      <p:sp>
-        <p:nvSpPr>
-          <p:cNvPr id="6" name="Rounded Rectangle 5"/>
+              <a:t>Architecture</a:t>
+            </a:r>
+          </a:p>
+        </p:txBody>
+      </p:sp>
+      <p:sp>
+        <p:nvSpPr>
+          <p:cNvPr id="5" name="Rounded Rectangle 4"/>
           <p:cNvSpPr/>
           <p:nvPr/>
         </p:nvSpPr>
         <p:spPr>
           <a:xfrm>
-            <a:off x="640080" y="5806440"/>
-            <a:ext cx="10881360" cy="502920"/>
+            <a:off x="640080" y="1554480"/>
+            <a:ext cx="10881360" cy="841248"/>
           </a:xfrm>
           <a:prstGeom prst="roundRect">
             <a:avLst/>
           </a:prstGeom>
           <a:solidFill>
-            <a:srgbClr val="EEF2F8"/>
+            <a:srgbClr val="12365C"/>
           </a:solidFill>
           <a:ln>
             <a:noFill/>
@@ -4871,14 +4431,14 @@
       </p:sp>
       <p:sp>
         <p:nvSpPr>
-          <p:cNvPr id="7" name="TextBox 6"/>
+          <p:cNvPr id="6" name="TextBox 5"/>
           <p:cNvSpPr txBox="1"/>
           <p:nvPr/>
         </p:nvSpPr>
         <p:spPr>
           <a:xfrm>
-            <a:off x="868680" y="5852160"/>
-            <a:ext cx="10424160" cy="457200"/>
+            <a:off x="914400" y="1554480"/>
+            <a:ext cx="3108960" cy="841248"/>
           </a:xfrm>
           <a:prstGeom prst="rect">
             <a:avLst/>
@@ -4900,20 +4460,574 @@
               </a:spcAft>
             </a:pPr>
             <a:r>
-              <a:rPr sz="1300" b="1">
-                <a:solidFill>
-                  <a:srgbClr val="12365C"/>
-                </a:solidFill>
-                <a:latin typeface="Segoe UI"/>
-              </a:rPr>
-              <a:t>Offline-first: real savings with no API key; better still with Claude or a local model.</a:t>
-            </a:r>
-          </a:p>
-        </p:txBody>
-      </p:sp>
-      <p:sp>
-        <p:nvSpPr>
-          <p:cNvPr id="8" name="TextBox 7"/>
+              <a:rPr sz="1600" b="1">
+                <a:solidFill>
+                  <a:srgbClr val="FFFFFF"/>
+                </a:solidFill>
+                <a:latin typeface="Segoe UI"/>
+              </a:rPr>
+              <a:t>Interfaces</a:t>
+            </a:r>
+          </a:p>
+        </p:txBody>
+      </p:sp>
+      <p:sp>
+        <p:nvSpPr>
+          <p:cNvPr id="7" name="TextBox 6"/>
+          <p:cNvSpPr txBox="1"/>
+          <p:nvPr/>
+        </p:nvSpPr>
+        <p:spPr>
+          <a:xfrm>
+            <a:off x="4114800" y="1554480"/>
+            <a:ext cx="7315200" cy="841248"/>
+          </a:xfrm>
+          <a:prstGeom prst="rect">
+            <a:avLst/>
+          </a:prstGeom>
+          <a:noFill/>
+        </p:spPr>
+        <p:txBody>
+          <a:bodyPr wrap="square" anchor="ctr">
+            <a:spAutoFit/>
+          </a:bodyPr>
+          <a:lstStyle/>
+          <a:p>
+            <a:pPr algn="l">
+              <a:spcBef>
+                <a:spcPts val="0"/>
+              </a:spcBef>
+              <a:spcAft>
+                <a:spcPts val="600"/>
+              </a:spcAft>
+            </a:pPr>
+            <a:r>
+              <a:rPr sz="1300" b="0">
+                <a:solidFill>
+                  <a:srgbClr val="E8EEF7"/>
+                </a:solidFill>
+                <a:latin typeface="Segoe UI"/>
+              </a:rPr>
+              <a:t>CLI · Desktop UI · Packaged skills</a:t>
+            </a:r>
+          </a:p>
+        </p:txBody>
+      </p:sp>
+      <p:sp>
+        <p:nvSpPr>
+          <p:cNvPr id="8" name="Rounded Rectangle 7"/>
+          <p:cNvSpPr/>
+          <p:nvPr/>
+        </p:nvSpPr>
+        <p:spPr>
+          <a:xfrm>
+            <a:off x="640080" y="2487168"/>
+            <a:ext cx="10881360" cy="841248"/>
+          </a:xfrm>
+          <a:prstGeom prst="roundRect">
+            <a:avLst/>
+          </a:prstGeom>
+          <a:solidFill>
+            <a:srgbClr val="1A5EB8"/>
+          </a:solidFill>
+          <a:ln>
+            <a:noFill/>
+          </a:ln>
+          <a:effectLst/>
+        </p:spPr>
+        <p:style>
+          <a:lnRef idx="1">
+            <a:schemeClr val="accent1"/>
+          </a:lnRef>
+          <a:fillRef idx="3">
+            <a:schemeClr val="accent1"/>
+          </a:fillRef>
+          <a:effectRef idx="2">
+            <a:schemeClr val="accent1"/>
+          </a:effectRef>
+          <a:fontRef idx="minor">
+            <a:schemeClr val="lt1"/>
+          </a:fontRef>
+        </p:style>
+        <p:txBody>
+          <a:bodyPr rtlCol="0" anchor="ctr"/>
+          <a:lstStyle/>
+          <a:p>
+            <a:pPr algn="ctr"/>
+          </a:p>
+        </p:txBody>
+      </p:sp>
+      <p:sp>
+        <p:nvSpPr>
+          <p:cNvPr id="9" name="TextBox 8"/>
+          <p:cNvSpPr txBox="1"/>
+          <p:nvPr/>
+        </p:nvSpPr>
+        <p:spPr>
+          <a:xfrm>
+            <a:off x="914400" y="2487168"/>
+            <a:ext cx="3108960" cy="841248"/>
+          </a:xfrm>
+          <a:prstGeom prst="rect">
+            <a:avLst/>
+          </a:prstGeom>
+          <a:noFill/>
+        </p:spPr>
+        <p:txBody>
+          <a:bodyPr wrap="square" anchor="ctr">
+            <a:spAutoFit/>
+          </a:bodyPr>
+          <a:lstStyle/>
+          <a:p>
+            <a:pPr algn="l">
+              <a:spcBef>
+                <a:spcPts val="0"/>
+              </a:spcBef>
+              <a:spcAft>
+                <a:spcPts val="600"/>
+              </a:spcAft>
+            </a:pPr>
+            <a:r>
+              <a:rPr sz="1600" b="1">
+                <a:solidFill>
+                  <a:srgbClr val="FFFFFF"/>
+                </a:solidFill>
+                <a:latin typeface="Segoe UI"/>
+              </a:rPr>
+              <a:t>Skills &amp; Evaluation</a:t>
+            </a:r>
+          </a:p>
+        </p:txBody>
+      </p:sp>
+      <p:sp>
+        <p:nvSpPr>
+          <p:cNvPr id="10" name="TextBox 9"/>
+          <p:cNvSpPr txBox="1"/>
+          <p:nvPr/>
+        </p:nvSpPr>
+        <p:spPr>
+          <a:xfrm>
+            <a:off x="4114800" y="2487168"/>
+            <a:ext cx="7315200" cy="841248"/>
+          </a:xfrm>
+          <a:prstGeom prst="rect">
+            <a:avLst/>
+          </a:prstGeom>
+          <a:noFill/>
+        </p:spPr>
+        <p:txBody>
+          <a:bodyPr wrap="square" anchor="ctr">
+            <a:spAutoFit/>
+          </a:bodyPr>
+          <a:lstStyle/>
+          <a:p>
+            <a:pPr algn="l">
+              <a:spcBef>
+                <a:spcPts val="0"/>
+              </a:spcBef>
+              <a:spcAft>
+                <a:spcPts val="600"/>
+              </a:spcAft>
+            </a:pPr>
+            <a:r>
+              <a:rPr sz="1300" b="0">
+                <a:solidFill>
+                  <a:srgbClr val="E8EEF7"/>
+                </a:solidFill>
+                <a:latin typeface="Segoe UI"/>
+              </a:rPr>
+              <a:t>prd · anchor · router · A/B runner · dashboard</a:t>
+            </a:r>
+          </a:p>
+        </p:txBody>
+      </p:sp>
+      <p:sp>
+        <p:nvSpPr>
+          <p:cNvPr id="11" name="Rounded Rectangle 10"/>
+          <p:cNvSpPr/>
+          <p:nvPr/>
+        </p:nvSpPr>
+        <p:spPr>
+          <a:xfrm>
+            <a:off x="640080" y="3419856"/>
+            <a:ext cx="10881360" cy="841248"/>
+          </a:xfrm>
+          <a:prstGeom prst="roundRect">
+            <a:avLst/>
+          </a:prstGeom>
+          <a:solidFill>
+            <a:srgbClr val="134A94"/>
+          </a:solidFill>
+          <a:ln>
+            <a:noFill/>
+          </a:ln>
+          <a:effectLst/>
+        </p:spPr>
+        <p:style>
+          <a:lnRef idx="1">
+            <a:schemeClr val="accent1"/>
+          </a:lnRef>
+          <a:fillRef idx="3">
+            <a:schemeClr val="accent1"/>
+          </a:fillRef>
+          <a:effectRef idx="2">
+            <a:schemeClr val="accent1"/>
+          </a:effectRef>
+          <a:fontRef idx="minor">
+            <a:schemeClr val="lt1"/>
+          </a:fontRef>
+        </p:style>
+        <p:txBody>
+          <a:bodyPr rtlCol="0" anchor="ctr"/>
+          <a:lstStyle/>
+          <a:p>
+            <a:pPr algn="ctr"/>
+          </a:p>
+        </p:txBody>
+      </p:sp>
+      <p:sp>
+        <p:nvSpPr>
+          <p:cNvPr id="12" name="TextBox 11"/>
+          <p:cNvSpPr txBox="1"/>
+          <p:nvPr/>
+        </p:nvSpPr>
+        <p:spPr>
+          <a:xfrm>
+            <a:off x="914400" y="3419856"/>
+            <a:ext cx="3108960" cy="841248"/>
+          </a:xfrm>
+          <a:prstGeom prst="rect">
+            <a:avLst/>
+          </a:prstGeom>
+          <a:noFill/>
+        </p:spPr>
+        <p:txBody>
+          <a:bodyPr wrap="square" anchor="ctr">
+            <a:spAutoFit/>
+          </a:bodyPr>
+          <a:lstStyle/>
+          <a:p>
+            <a:pPr algn="l">
+              <a:spcBef>
+                <a:spcPts val="0"/>
+              </a:spcBef>
+              <a:spcAft>
+                <a:spcPts val="600"/>
+              </a:spcAft>
+            </a:pPr>
+            <a:r>
+              <a:rPr sz="1600" b="1">
+                <a:solidFill>
+                  <a:srgbClr val="FFFFFF"/>
+                </a:solidFill>
+                <a:latin typeface="Segoe UI"/>
+              </a:rPr>
+              <a:t>Optimize</a:t>
+            </a:r>
+          </a:p>
+        </p:txBody>
+      </p:sp>
+      <p:sp>
+        <p:nvSpPr>
+          <p:cNvPr id="13" name="TextBox 12"/>
+          <p:cNvSpPr txBox="1"/>
+          <p:nvPr/>
+        </p:nvSpPr>
+        <p:spPr>
+          <a:xfrm>
+            <a:off x="4114800" y="3419856"/>
+            <a:ext cx="7315200" cy="841248"/>
+          </a:xfrm>
+          <a:prstGeom prst="rect">
+            <a:avLst/>
+          </a:prstGeom>
+          <a:noFill/>
+        </p:spPr>
+        <p:txBody>
+          <a:bodyPr wrap="square" anchor="ctr">
+            <a:spAutoFit/>
+          </a:bodyPr>
+          <a:lstStyle/>
+          <a:p>
+            <a:pPr algn="l">
+              <a:spcBef>
+                <a:spcPts val="0"/>
+              </a:spcBef>
+              <a:spcAft>
+                <a:spcPts val="600"/>
+              </a:spcAft>
+            </a:pPr>
+            <a:r>
+              <a:rPr sz="1300" b="0">
+                <a:solidFill>
+                  <a:srgbClr val="E8EEF7"/>
+                </a:solidFill>
+                <a:latin typeface="Segoe UI"/>
+              </a:rPr>
+              <a:t>reductions · compress · summarize · prefilter · tokens</a:t>
+            </a:r>
+          </a:p>
+        </p:txBody>
+      </p:sp>
+      <p:sp>
+        <p:nvSpPr>
+          <p:cNvPr id="14" name="Rounded Rectangle 13"/>
+          <p:cNvSpPr/>
+          <p:nvPr/>
+        </p:nvSpPr>
+        <p:spPr>
+          <a:xfrm>
+            <a:off x="640080" y="4352544"/>
+            <a:ext cx="10881360" cy="841248"/>
+          </a:xfrm>
+          <a:prstGeom prst="roundRect">
+            <a:avLst/>
+          </a:prstGeom>
+          <a:solidFill>
+            <a:srgbClr val="2C6BB0"/>
+          </a:solidFill>
+          <a:ln>
+            <a:noFill/>
+          </a:ln>
+          <a:effectLst/>
+        </p:spPr>
+        <p:style>
+          <a:lnRef idx="1">
+            <a:schemeClr val="accent1"/>
+          </a:lnRef>
+          <a:fillRef idx="3">
+            <a:schemeClr val="accent1"/>
+          </a:fillRef>
+          <a:effectRef idx="2">
+            <a:schemeClr val="accent1"/>
+          </a:effectRef>
+          <a:fontRef idx="minor">
+            <a:schemeClr val="lt1"/>
+          </a:fontRef>
+        </p:style>
+        <p:txBody>
+          <a:bodyPr rtlCol="0" anchor="ctr"/>
+          <a:lstStyle/>
+          <a:p>
+            <a:pPr algn="ctr"/>
+          </a:p>
+        </p:txBody>
+      </p:sp>
+      <p:sp>
+        <p:nvSpPr>
+          <p:cNvPr id="15" name="TextBox 14"/>
+          <p:cNvSpPr txBox="1"/>
+          <p:nvPr/>
+        </p:nvSpPr>
+        <p:spPr>
+          <a:xfrm>
+            <a:off x="914400" y="4352544"/>
+            <a:ext cx="3108960" cy="841248"/>
+          </a:xfrm>
+          <a:prstGeom prst="rect">
+            <a:avLst/>
+          </a:prstGeom>
+          <a:noFill/>
+        </p:spPr>
+        <p:txBody>
+          <a:bodyPr wrap="square" anchor="ctr">
+            <a:spAutoFit/>
+          </a:bodyPr>
+          <a:lstStyle/>
+          <a:p>
+            <a:pPr algn="l">
+              <a:spcBef>
+                <a:spcPts val="0"/>
+              </a:spcBef>
+              <a:spcAft>
+                <a:spcPts val="600"/>
+              </a:spcAft>
+            </a:pPr>
+            <a:r>
+              <a:rPr sz="1600" b="1">
+                <a:solidFill>
+                  <a:srgbClr val="FFFFFF"/>
+                </a:solidFill>
+                <a:latin typeface="Segoe UI"/>
+              </a:rPr>
+              <a:t>Integrations</a:t>
+            </a:r>
+          </a:p>
+        </p:txBody>
+      </p:sp>
+      <p:sp>
+        <p:nvSpPr>
+          <p:cNvPr id="16" name="TextBox 15"/>
+          <p:cNvSpPr txBox="1"/>
+          <p:nvPr/>
+        </p:nvSpPr>
+        <p:spPr>
+          <a:xfrm>
+            <a:off x="4114800" y="4352544"/>
+            <a:ext cx="7315200" cy="841248"/>
+          </a:xfrm>
+          <a:prstGeom prst="rect">
+            <a:avLst/>
+          </a:prstGeom>
+          <a:noFill/>
+        </p:spPr>
+        <p:txBody>
+          <a:bodyPr wrap="square" anchor="ctr">
+            <a:spAutoFit/>
+          </a:bodyPr>
+          <a:lstStyle/>
+          <a:p>
+            <a:pPr algn="l">
+              <a:spcBef>
+                <a:spcPts val="0"/>
+              </a:spcBef>
+              <a:spcAft>
+                <a:spcPts val="600"/>
+              </a:spcAft>
+            </a:pPr>
+            <a:r>
+              <a:rPr sz="1300" b="0">
+                <a:solidFill>
+                  <a:srgbClr val="E8EEF7"/>
+                </a:solidFill>
+                <a:latin typeface="Segoe UI"/>
+              </a:rPr>
+              <a:t>JIRA · GitHub · GitLab · Jenkins · Azure DevOps · documents</a:t>
+            </a:r>
+          </a:p>
+        </p:txBody>
+      </p:sp>
+      <p:sp>
+        <p:nvSpPr>
+          <p:cNvPr id="17" name="Rounded Rectangle 16"/>
+          <p:cNvSpPr/>
+          <p:nvPr/>
+        </p:nvSpPr>
+        <p:spPr>
+          <a:xfrm>
+            <a:off x="640080" y="5285232"/>
+            <a:ext cx="10881360" cy="841248"/>
+          </a:xfrm>
+          <a:prstGeom prst="roundRect">
+            <a:avLst/>
+          </a:prstGeom>
+          <a:solidFill>
+            <a:srgbClr val="1E8E4E"/>
+          </a:solidFill>
+          <a:ln>
+            <a:noFill/>
+          </a:ln>
+          <a:effectLst/>
+        </p:spPr>
+        <p:style>
+          <a:lnRef idx="1">
+            <a:schemeClr val="accent1"/>
+          </a:lnRef>
+          <a:fillRef idx="3">
+            <a:schemeClr val="accent1"/>
+          </a:fillRef>
+          <a:effectRef idx="2">
+            <a:schemeClr val="accent1"/>
+          </a:effectRef>
+          <a:fontRef idx="minor">
+            <a:schemeClr val="lt1"/>
+          </a:fontRef>
+        </p:style>
+        <p:txBody>
+          <a:bodyPr rtlCol="0" anchor="ctr"/>
+          <a:lstStyle/>
+          <a:p>
+            <a:pPr algn="ctr"/>
+          </a:p>
+        </p:txBody>
+      </p:sp>
+      <p:sp>
+        <p:nvSpPr>
+          <p:cNvPr id="18" name="TextBox 17"/>
+          <p:cNvSpPr txBox="1"/>
+          <p:nvPr/>
+        </p:nvSpPr>
+        <p:spPr>
+          <a:xfrm>
+            <a:off x="914400" y="5285232"/>
+            <a:ext cx="3108960" cy="841248"/>
+          </a:xfrm>
+          <a:prstGeom prst="rect">
+            <a:avLst/>
+          </a:prstGeom>
+          <a:noFill/>
+        </p:spPr>
+        <p:txBody>
+          <a:bodyPr wrap="square" anchor="ctr">
+            <a:spAutoFit/>
+          </a:bodyPr>
+          <a:lstStyle/>
+          <a:p>
+            <a:pPr algn="l">
+              <a:spcBef>
+                <a:spcPts val="0"/>
+              </a:spcBef>
+              <a:spcAft>
+                <a:spcPts val="600"/>
+              </a:spcAft>
+            </a:pPr>
+            <a:r>
+              <a:rPr sz="1600" b="1">
+                <a:solidFill>
+                  <a:srgbClr val="FFFFFF"/>
+                </a:solidFill>
+                <a:latin typeface="Segoe UI"/>
+              </a:rPr>
+              <a:t>Core</a:t>
+            </a:r>
+          </a:p>
+        </p:txBody>
+      </p:sp>
+      <p:sp>
+        <p:nvSpPr>
+          <p:cNvPr id="19" name="TextBox 18"/>
+          <p:cNvSpPr txBox="1"/>
+          <p:nvPr/>
+        </p:nvSpPr>
+        <p:spPr>
+          <a:xfrm>
+            <a:off x="4114800" y="5285232"/>
+            <a:ext cx="7315200" cy="841248"/>
+          </a:xfrm>
+          <a:prstGeom prst="rect">
+            <a:avLst/>
+          </a:prstGeom>
+          <a:noFill/>
+        </p:spPr>
+        <p:txBody>
+          <a:bodyPr wrap="square" anchor="ctr">
+            <a:spAutoFit/>
+          </a:bodyPr>
+          <a:lstStyle/>
+          <a:p>
+            <a:pPr algn="l">
+              <a:spcBef>
+                <a:spcPts val="0"/>
+              </a:spcBef>
+              <a:spcAft>
+                <a:spcPts val="600"/>
+              </a:spcAft>
+            </a:pPr>
+            <a:r>
+              <a:rPr sz="1300" b="0">
+                <a:solidFill>
+                  <a:srgbClr val="E8EEF7"/>
+                </a:solidFill>
+                <a:latin typeface="Segoe UI"/>
+              </a:rPr>
+              <a:t>config · run_log · llm (client + cache)</a:t>
+            </a:r>
+          </a:p>
+        </p:txBody>
+      </p:sp>
+      <p:sp>
+        <p:nvSpPr>
+          <p:cNvPr id="20" name="TextBox 19"/>
           <p:cNvSpPr txBox="1"/>
           <p:nvPr/>
         </p:nvSpPr>
@@ -4955,7 +5069,7 @@
       </p:sp>
       <p:sp>
         <p:nvSpPr>
-          <p:cNvPr id="9" name="TextBox 8"/>
+          <p:cNvPr id="21" name="TextBox 20"/>
           <p:cNvSpPr txBox="1"/>
           <p:nvPr/>
         </p:nvSpPr>
@@ -5022,6 +5136,454 @@
         <p:spPr>
           <a:xfrm>
             <a:off x="0" y="0"/>
+            <a:ext cx="12191695" cy="1051560"/>
+          </a:xfrm>
+          <a:prstGeom prst="rect">
+            <a:avLst/>
+          </a:prstGeom>
+          <a:solidFill>
+            <a:srgbClr val="12365C"/>
+          </a:solidFill>
+          <a:ln>
+            <a:noFill/>
+          </a:ln>
+          <a:effectLst/>
+        </p:spPr>
+        <p:style>
+          <a:lnRef idx="1">
+            <a:schemeClr val="accent1"/>
+          </a:lnRef>
+          <a:fillRef idx="3">
+            <a:schemeClr val="accent1"/>
+          </a:fillRef>
+          <a:effectRef idx="2">
+            <a:schemeClr val="accent1"/>
+          </a:effectRef>
+          <a:fontRef idx="minor">
+            <a:schemeClr val="lt1"/>
+          </a:fontRef>
+        </p:style>
+        <p:txBody>
+          <a:bodyPr rtlCol="0" anchor="ctr"/>
+          <a:lstStyle/>
+          <a:p>
+            <a:pPr algn="ctr"/>
+          </a:p>
+        </p:txBody>
+      </p:sp>
+      <p:sp>
+        <p:nvSpPr>
+          <p:cNvPr id="3" name="Rectangle 2"/>
+          <p:cNvSpPr/>
+          <p:nvPr/>
+        </p:nvSpPr>
+        <p:spPr>
+          <a:xfrm>
+            <a:off x="0" y="1051560"/>
+            <a:ext cx="12191695" cy="54864"/>
+          </a:xfrm>
+          <a:prstGeom prst="rect">
+            <a:avLst/>
+          </a:prstGeom>
+          <a:solidFill>
+            <a:srgbClr val="1A5EB8"/>
+          </a:solidFill>
+          <a:ln>
+            <a:noFill/>
+          </a:ln>
+          <a:effectLst/>
+        </p:spPr>
+        <p:style>
+          <a:lnRef idx="1">
+            <a:schemeClr val="accent1"/>
+          </a:lnRef>
+          <a:fillRef idx="3">
+            <a:schemeClr val="accent1"/>
+          </a:fillRef>
+          <a:effectRef idx="2">
+            <a:schemeClr val="accent1"/>
+          </a:effectRef>
+          <a:fontRef idx="minor">
+            <a:schemeClr val="lt1"/>
+          </a:fontRef>
+        </p:style>
+        <p:txBody>
+          <a:bodyPr rtlCol="0" anchor="ctr"/>
+          <a:lstStyle/>
+          <a:p>
+            <a:pPr algn="ctr"/>
+          </a:p>
+        </p:txBody>
+      </p:sp>
+      <p:sp>
+        <p:nvSpPr>
+          <p:cNvPr id="4" name="TextBox 3"/>
+          <p:cNvSpPr txBox="1"/>
+          <p:nvPr/>
+        </p:nvSpPr>
+        <p:spPr>
+          <a:xfrm>
+            <a:off x="548640" y="146304"/>
+            <a:ext cx="11064240" cy="868680"/>
+          </a:xfrm>
+          <a:prstGeom prst="rect">
+            <a:avLst/>
+          </a:prstGeom>
+          <a:noFill/>
+        </p:spPr>
+        <p:txBody>
+          <a:bodyPr wrap="square" anchor="ctr">
+            <a:spAutoFit/>
+          </a:bodyPr>
+          <a:lstStyle/>
+          <a:p>
+            <a:pPr algn="l">
+              <a:spcBef>
+                <a:spcPts val="0"/>
+              </a:spcBef>
+              <a:spcAft>
+                <a:spcPts val="200"/>
+              </a:spcAft>
+            </a:pPr>
+            <a:r>
+              <a:rPr sz="1100" b="1">
+                <a:solidFill>
+                  <a:srgbClr val="8FB4E0"/>
+                </a:solidFill>
+                <a:latin typeface="Segoe UI"/>
+              </a:rPr>
+              <a:t>WHY IT SCALES</a:t>
+            </a:r>
+          </a:p>
+          <a:p>
+            <a:pPr algn="l">
+              <a:spcBef>
+                <a:spcPts val="0"/>
+              </a:spcBef>
+              <a:spcAft>
+                <a:spcPts val="600"/>
+              </a:spcAft>
+            </a:pPr>
+            <a:r>
+              <a:rPr sz="2600" b="1">
+                <a:solidFill>
+                  <a:srgbClr val="FFFFFF"/>
+                </a:solidFill>
+                <a:latin typeface="Segoe UI"/>
+              </a:rPr>
+              <a:t>Business Value</a:t>
+            </a:r>
+          </a:p>
+        </p:txBody>
+      </p:sp>
+      <p:sp>
+        <p:nvSpPr>
+          <p:cNvPr id="5" name="TextBox 4"/>
+          <p:cNvSpPr txBox="1"/>
+          <p:nvPr/>
+        </p:nvSpPr>
+        <p:spPr>
+          <a:xfrm>
+            <a:off x="640080" y="1417320"/>
+            <a:ext cx="10881360" cy="4572000"/>
+          </a:xfrm>
+          <a:prstGeom prst="rect">
+            <a:avLst/>
+          </a:prstGeom>
+          <a:noFill/>
+        </p:spPr>
+        <p:txBody>
+          <a:bodyPr wrap="square" anchor="t">
+            <a:spAutoFit/>
+          </a:bodyPr>
+          <a:lstStyle/>
+          <a:p>
+            <a:pPr algn="l">
+              <a:lnSpc>
+                <a:spcPct val="105000"/>
+              </a:lnSpc>
+              <a:spcBef>
+                <a:spcPts val="0"/>
+              </a:spcBef>
+              <a:spcAft>
+                <a:spcPts val="1200"/>
+              </a:spcAft>
+            </a:pPr>
+            <a:r>
+              <a:rPr sz="1800" b="0">
+                <a:solidFill>
+                  <a:srgbClr val="16233A"/>
+                </a:solidFill>
+                <a:latin typeface="Segoe UI"/>
+              </a:rPr>
+              <a:t>•  Direct cost savings of up to ~58% on AI-assisted development spend.</a:t>
+            </a:r>
+          </a:p>
+          <a:p>
+            <a:pPr algn="l">
+              <a:lnSpc>
+                <a:spcPct val="105000"/>
+              </a:lnSpc>
+              <a:spcBef>
+                <a:spcPts val="0"/>
+              </a:spcBef>
+              <a:spcAft>
+                <a:spcPts val="1200"/>
+              </a:spcAft>
+            </a:pPr>
+            <a:r>
+              <a:rPr sz="1800" b="0">
+                <a:solidFill>
+                  <a:srgbClr val="16233A"/>
+                </a:solidFill>
+                <a:latin typeface="Segoe UI"/>
+              </a:rPr>
+              <a:t>•  Validated across 2 business units — extensible to the whole org.</a:t>
+            </a:r>
+          </a:p>
+          <a:p>
+            <a:pPr algn="l">
+              <a:lnSpc>
+                <a:spcPct val="105000"/>
+              </a:lnSpc>
+              <a:spcBef>
+                <a:spcPts val="0"/>
+              </a:spcBef>
+              <a:spcAft>
+                <a:spcPts val="1200"/>
+              </a:spcAft>
+            </a:pPr>
+            <a:r>
+              <a:rPr sz="1800" b="0">
+                <a:solidFill>
+                  <a:srgbClr val="16233A"/>
+                </a:solidFill>
+                <a:latin typeface="Segoe UI"/>
+              </a:rPr>
+              <a:t>•  Higher trust in AI output through verifiable file:line anchoring.</a:t>
+            </a:r>
+          </a:p>
+          <a:p>
+            <a:pPr algn="l">
+              <a:lnSpc>
+                <a:spcPct val="105000"/>
+              </a:lnSpc>
+              <a:spcBef>
+                <a:spcPts val="0"/>
+              </a:spcBef>
+              <a:spcAft>
+                <a:spcPts val="1200"/>
+              </a:spcAft>
+            </a:pPr>
+            <a:r>
+              <a:rPr sz="1800" b="0">
+                <a:solidFill>
+                  <a:srgbClr val="16233A"/>
+                </a:solidFill>
+                <a:latin typeface="Segoe UI"/>
+              </a:rPr>
+              <a:t>•  Data-driven — every claim backed by A/B evidence, not anecdote.</a:t>
+            </a:r>
+          </a:p>
+        </p:txBody>
+      </p:sp>
+      <p:sp>
+        <p:nvSpPr>
+          <p:cNvPr id="6" name="Rounded Rectangle 5"/>
+          <p:cNvSpPr/>
+          <p:nvPr/>
+        </p:nvSpPr>
+        <p:spPr>
+          <a:xfrm>
+            <a:off x="640080" y="5806440"/>
+            <a:ext cx="10881360" cy="502920"/>
+          </a:xfrm>
+          <a:prstGeom prst="roundRect">
+            <a:avLst/>
+          </a:prstGeom>
+          <a:solidFill>
+            <a:srgbClr val="EEF2F8"/>
+          </a:solidFill>
+          <a:ln>
+            <a:noFill/>
+          </a:ln>
+          <a:effectLst/>
+        </p:spPr>
+        <p:style>
+          <a:lnRef idx="1">
+            <a:schemeClr val="accent1"/>
+          </a:lnRef>
+          <a:fillRef idx="3">
+            <a:schemeClr val="accent1"/>
+          </a:fillRef>
+          <a:effectRef idx="2">
+            <a:schemeClr val="accent1"/>
+          </a:effectRef>
+          <a:fontRef idx="minor">
+            <a:schemeClr val="lt1"/>
+          </a:fontRef>
+        </p:style>
+        <p:txBody>
+          <a:bodyPr rtlCol="0" anchor="ctr"/>
+          <a:lstStyle/>
+          <a:p>
+            <a:pPr algn="ctr"/>
+          </a:p>
+        </p:txBody>
+      </p:sp>
+      <p:sp>
+        <p:nvSpPr>
+          <p:cNvPr id="7" name="TextBox 6"/>
+          <p:cNvSpPr txBox="1"/>
+          <p:nvPr/>
+        </p:nvSpPr>
+        <p:spPr>
+          <a:xfrm>
+            <a:off x="868680" y="5852160"/>
+            <a:ext cx="10424160" cy="457200"/>
+          </a:xfrm>
+          <a:prstGeom prst="rect">
+            <a:avLst/>
+          </a:prstGeom>
+          <a:noFill/>
+        </p:spPr>
+        <p:txBody>
+          <a:bodyPr wrap="square" anchor="ctr">
+            <a:spAutoFit/>
+          </a:bodyPr>
+          <a:lstStyle/>
+          <a:p>
+            <a:pPr algn="l">
+              <a:spcBef>
+                <a:spcPts val="0"/>
+              </a:spcBef>
+              <a:spcAft>
+                <a:spcPts val="600"/>
+              </a:spcAft>
+            </a:pPr>
+            <a:r>
+              <a:rPr sz="1300" b="1">
+                <a:solidFill>
+                  <a:srgbClr val="12365C"/>
+                </a:solidFill>
+                <a:latin typeface="Segoe UI"/>
+              </a:rPr>
+              <a:t>Offline-first: real savings with no API key; better still with Claude or a local model.</a:t>
+            </a:r>
+          </a:p>
+        </p:txBody>
+      </p:sp>
+      <p:sp>
+        <p:nvSpPr>
+          <p:cNvPr id="8" name="TextBox 7"/>
+          <p:cNvSpPr txBox="1"/>
+          <p:nvPr/>
+        </p:nvSpPr>
+        <p:spPr>
+          <a:xfrm>
+            <a:off x="548640" y="6446520"/>
+            <a:ext cx="8229600" cy="320040"/>
+          </a:xfrm>
+          <a:prstGeom prst="rect">
+            <a:avLst/>
+          </a:prstGeom>
+          <a:noFill/>
+        </p:spPr>
+        <p:txBody>
+          <a:bodyPr wrap="square" anchor="t">
+            <a:spAutoFit/>
+          </a:bodyPr>
+          <a:lstStyle/>
+          <a:p>
+            <a:pPr algn="l">
+              <a:spcBef>
+                <a:spcPts val="0"/>
+              </a:spcBef>
+              <a:spcAft>
+                <a:spcPts val="600"/>
+              </a:spcAft>
+            </a:pPr>
+            <a:r>
+              <a:rPr sz="900" b="0">
+                <a:solidFill>
+                  <a:srgbClr val="5F6B7D"/>
+                </a:solidFill>
+                <a:latin typeface="Segoe UI"/>
+              </a:rPr>
+              <a:t>TokenOptimizer — Hackcelerate</a:t>
+            </a:r>
+          </a:p>
+        </p:txBody>
+      </p:sp>
+      <p:sp>
+        <p:nvSpPr>
+          <p:cNvPr id="9" name="TextBox 8"/>
+          <p:cNvSpPr txBox="1"/>
+          <p:nvPr/>
+        </p:nvSpPr>
+        <p:spPr>
+          <a:xfrm>
+            <a:off x="10424160" y="6446520"/>
+            <a:ext cx="1188720" cy="320040"/>
+          </a:xfrm>
+          <a:prstGeom prst="rect">
+            <a:avLst/>
+          </a:prstGeom>
+          <a:noFill/>
+        </p:spPr>
+        <p:txBody>
+          <a:bodyPr wrap="square" anchor="t">
+            <a:spAutoFit/>
+          </a:bodyPr>
+          <a:lstStyle/>
+          <a:p>
+            <a:pPr algn="r">
+              <a:spcBef>
+                <a:spcPts val="0"/>
+              </a:spcBef>
+              <a:spcAft>
+                <a:spcPts val="600"/>
+              </a:spcAft>
+            </a:pPr>
+            <a:r>
+              <a:rPr sz="900" b="0">
+                <a:solidFill>
+                  <a:srgbClr val="5F6B7D"/>
+                </a:solidFill>
+                <a:latin typeface="Segoe UI"/>
+              </a:rPr>
+              <a:t>12</a:t>
+            </a:r>
+          </a:p>
+        </p:txBody>
+      </p:sp>
+    </p:spTree>
+  </p:cSld>
+  <p:clrMapOvr>
+    <a:masterClrMapping/>
+  </p:clrMapOvr>
+</p:sld>
+</file>
+
+<file path=ppt/slides/slide13.xml><?xml version="1.0" encoding="utf-8"?>
+<p:sld xmlns:a="http://schemas.openxmlformats.org/drawingml/2006/main" xmlns:p="http://schemas.openxmlformats.org/presentationml/2006/main" xmlns:r="http://schemas.openxmlformats.org/officeDocument/2006/relationships">
+  <p:cSld>
+    <p:spTree>
+      <p:nvGrpSpPr>
+        <p:cNvPr id="1" name=""/>
+        <p:cNvGrpSpPr/>
+        <p:nvPr/>
+      </p:nvGrpSpPr>
+      <p:grpSpPr/>
+      <p:sp>
+        <p:nvSpPr>
+          <p:cNvPr id="2" name="Rectangle 1"/>
+          <p:cNvSpPr/>
+          <p:nvPr/>
+        </p:nvSpPr>
+        <p:spPr>
+          <a:xfrm>
+            <a:off x="0" y="0"/>
             <a:ext cx="12191695" cy="6858000"/>
           </a:xfrm>
           <a:prstGeom prst="rect">
@@ -9763,7 +10325,7 @@
                 </a:solidFill>
                 <a:latin typeface="Segoe UI"/>
               </a:rPr>
-              <a:t>Packaged skills</a:t>
+              <a:t>Skill plugins</a:t>
             </a:r>
           </a:p>
           <a:p>
@@ -9782,7 +10344,7 @@
                 </a:solidFill>
                 <a:latin typeface="Segoe UI"/>
               </a:rPr>
-              <a:t>Invokable Claude Code skills under .claude/skills/.</a:t>
+              <a:t>Self-contained, independently-maintained packages under skills/ (code + SKILL.md + tests).</a:t>
             </a:r>
           </a:p>
         </p:txBody>
